--- a/assets/pptx/catalog-404.pptx
+++ b/assets/pptx/catalog-404.pptx
@@ -3620,7 +3620,7 @@
                 <a:ea typeface="Ebrima"/>
                 <a:cs typeface="Ebrima"/>
               </a:rPr>
-              <a:t>ሰግቼ ለምን እኖራለሁ (2x)</a:t>
+              <a:t>ሰግቼ ለምን እኖራለሁ 2x</a:t>
             </a:r>
           </a:p>
         </p:txBody>
@@ -3705,7 +3705,7 @@
                 <a:ea typeface="Ebrima"/>
                 <a:cs typeface="Ebrima"/>
               </a:rPr>
-              <a:t>እንደ ሀሳብህ ልሁን እንደፈቃድህ (2x)</a:t>
+              <a:t>እንደ ሀሳብህ ልሁን እንደፈቃድህ 2x</a:t>
             </a:r>
           </a:p>
         </p:txBody>
@@ -4032,7 +4032,7 @@
                 <a:ea typeface="Ebrima"/>
                 <a:cs typeface="Ebrima"/>
               </a:rPr>
-              <a:t>እንደ ሀሳብህ ልሁን እንደፈቃድህ (2x)</a:t>
+              <a:t>እንደ ሀሳብህ ልሁን እንደፈቃድህ 2x</a:t>
             </a:r>
           </a:p>
         </p:txBody>
@@ -4189,7 +4189,7 @@
                 <a:ea typeface="Ebrima"/>
                 <a:cs typeface="Ebrima"/>
               </a:rPr>
-              <a:t>ዘመኔን በአንተ ስር ከአደረከው (2x)</a:t>
+              <a:t>ዘመኔን በአንተ ስር ከአደረከው 2x</a:t>
             </a:r>
           </a:p>
         </p:txBody>
@@ -4346,7 +4346,7 @@
                 <a:ea typeface="Ebrima"/>
                 <a:cs typeface="Ebrima"/>
               </a:rPr>
-              <a:t>በላይ እህል ውኃ (2x)</a:t>
+              <a:t>በላይ እህል ውኃ 2x</a:t>
             </a:r>
           </a:p>
         </p:txBody>
@@ -4673,7 +4673,7 @@
                 <a:ea typeface="Ebrima"/>
                 <a:cs typeface="Ebrima"/>
               </a:rPr>
-              <a:t>እንደ ሀሳብህ ልሁን እንደፈቃድህ (2x)</a:t>
+              <a:t>እንደ ሀሳብህ ልሁን እንደፈቃድህ 2x</a:t>
             </a:r>
           </a:p>
         </p:txBody>
